--- a/graphical_abstract/graphical_abstract_v3_editable.pptx
+++ b/graphical_abstract/graphical_abstract_v3_editable.pptx
@@ -5348,7 +5348,7 @@
                 </a:solidFill>
                 <a:latin typeface="Calibri"/>
               </a:rPr>
-              <a:t>Shu Y, Chen K, Luo A — Central South University — European Radiology submission, 2026</a:t>
+              <a:t>Shu Y et al. — Central South University — European Radiology submission, 2026</a:t>
             </a:r>
           </a:p>
         </p:txBody>
